--- a/Dynamic_Industry_One_Page_Dashboard.pptx
+++ b/Dynamic_Industry_One_Page_Dashboard.pptx
@@ -895,15 +895,39 @@
           <a:ln/>
         </p:spPr>
       </p:sp>
-      <p:sp>
-        <p:nvSpPr>
-          <p:cNvPr id="3" name="Text 1"/>
-          <p:cNvSpPr/>
-          <p:nvPr/>
-        </p:nvSpPr>
-        <p:spPr>
-          <a:xfrm>
-            <a:off x="411480" y="128016"/>
+      <p:pic>
+        <p:nvPicPr>
+          <p:cNvPr id="3" name="Image 0" descr="preencoded.png">    </p:cNvPr>
+          <p:cNvPicPr>
+            <a:picLocks noChangeAspect="1"/>
+          </p:cNvPicPr>
+          <p:nvPr/>
+        </p:nvPicPr>
+        <p:blipFill>
+          <a:blip r:embed="rId1"/>
+          <a:stretch>
+            <a:fillRect/>
+          </a:stretch>
+        </p:blipFill>
+        <p:spPr>
+          <a:xfrm>
+            <a:off x="411480" y="182880"/>
+            <a:ext cx="612648" cy="548640"/>
+          </a:xfrm>
+          <a:prstGeom prst="rect">
+            <a:avLst/>
+          </a:prstGeom>
+        </p:spPr>
+      </p:pic>
+      <p:sp>
+        <p:nvSpPr>
+          <p:cNvPr id="4" name="Text 1"/>
+          <p:cNvSpPr/>
+          <p:nvPr/>
+        </p:nvSpPr>
+        <p:spPr>
+          <a:xfrm>
+            <a:off x="1188720" y="128016"/>
             <a:ext cx="3657600" cy="274320"/>
           </a:xfrm>
           <a:prstGeom prst="rect">
@@ -936,14 +960,14 @@
       </p:sp>
       <p:sp>
         <p:nvSpPr>
-          <p:cNvPr id="4" name="Text 2"/>
-          <p:cNvSpPr/>
-          <p:nvPr/>
-        </p:nvSpPr>
-        <p:spPr>
-          <a:xfrm>
-            <a:off x="411480" y="384048"/>
-            <a:ext cx="8412480" cy="457200"/>
+          <p:cNvPr id="5" name="Text 2"/>
+          <p:cNvSpPr/>
+          <p:nvPr/>
+        </p:nvSpPr>
+        <p:spPr>
+          <a:xfrm>
+            <a:off x="1188720" y="384048"/>
+            <a:ext cx="7680960" cy="457200"/>
           </a:xfrm>
           <a:prstGeom prst="rect">
             <a:avLst/>
@@ -1003,7 +1027,7 @@
       </p:sp>
       <p:sp>
         <p:nvSpPr>
-          <p:cNvPr id="5" name="Text 3"/>
+          <p:cNvPr id="6" name="Text 3"/>
           <p:cNvSpPr/>
           <p:nvPr/>
         </p:nvSpPr>
@@ -1042,7 +1066,7 @@
       </p:sp>
       <p:sp>
         <p:nvSpPr>
-          <p:cNvPr id="6" name="Text 4"/>
+          <p:cNvPr id="7" name="Text 4"/>
           <p:cNvSpPr/>
           <p:nvPr/>
         </p:nvSpPr>
@@ -1081,7 +1105,7 @@
       </p:sp>
       <p:sp>
         <p:nvSpPr>
-          <p:cNvPr id="7" name="Shape 5"/>
+          <p:cNvPr id="8" name="Shape 5"/>
           <p:cNvSpPr/>
           <p:nvPr/>
         </p:nvSpPr>
@@ -1115,7 +1139,7 @@
       </p:sp>
       <p:sp>
         <p:nvSpPr>
-          <p:cNvPr id="8" name="Text 6"/>
+          <p:cNvPr id="9" name="Text 6"/>
           <p:cNvSpPr/>
           <p:nvPr/>
         </p:nvSpPr>
@@ -1154,7 +1178,7 @@
       </p:sp>
       <p:sp>
         <p:nvSpPr>
-          <p:cNvPr id="9" name="Text 7"/>
+          <p:cNvPr id="10" name="Text 7"/>
           <p:cNvSpPr/>
           <p:nvPr/>
         </p:nvSpPr>
@@ -1193,7 +1217,7 @@
       </p:sp>
       <p:sp>
         <p:nvSpPr>
-          <p:cNvPr id="10" name="Shape 8"/>
+          <p:cNvPr id="11" name="Shape 8"/>
           <p:cNvSpPr/>
           <p:nvPr/>
         </p:nvSpPr>
@@ -1227,7 +1251,7 @@
       </p:sp>
       <p:sp>
         <p:nvSpPr>
-          <p:cNvPr id="11" name="Text 9"/>
+          <p:cNvPr id="12" name="Text 9"/>
           <p:cNvSpPr/>
           <p:nvPr/>
         </p:nvSpPr>
@@ -1266,7 +1290,7 @@
       </p:sp>
       <p:sp>
         <p:nvSpPr>
-          <p:cNvPr id="12" name="Text 10"/>
+          <p:cNvPr id="13" name="Text 10"/>
           <p:cNvSpPr/>
           <p:nvPr/>
         </p:nvSpPr>
@@ -1305,7 +1329,7 @@
       </p:sp>
       <p:sp>
         <p:nvSpPr>
-          <p:cNvPr id="13" name="Shape 11"/>
+          <p:cNvPr id="14" name="Shape 11"/>
           <p:cNvSpPr/>
           <p:nvPr/>
         </p:nvSpPr>
@@ -1339,7 +1363,7 @@
       </p:sp>
       <p:sp>
         <p:nvSpPr>
-          <p:cNvPr id="14" name="Text 12"/>
+          <p:cNvPr id="15" name="Text 12"/>
           <p:cNvSpPr/>
           <p:nvPr/>
         </p:nvSpPr>
@@ -1378,7 +1402,7 @@
       </p:sp>
       <p:sp>
         <p:nvSpPr>
-          <p:cNvPr id="15" name="Text 13"/>
+          <p:cNvPr id="16" name="Text 13"/>
           <p:cNvSpPr/>
           <p:nvPr/>
         </p:nvSpPr>
@@ -1417,7 +1441,7 @@
       </p:sp>
       <p:sp>
         <p:nvSpPr>
-          <p:cNvPr id="16" name="Shape 14"/>
+          <p:cNvPr id="17" name="Shape 14"/>
           <p:cNvSpPr/>
           <p:nvPr/>
         </p:nvSpPr>
@@ -1451,7 +1475,7 @@
       </p:sp>
       <p:sp>
         <p:nvSpPr>
-          <p:cNvPr id="17" name="Text 15"/>
+          <p:cNvPr id="18" name="Text 15"/>
           <p:cNvSpPr/>
           <p:nvPr/>
         </p:nvSpPr>
@@ -1490,7 +1514,7 @@
       </p:sp>
       <p:sp>
         <p:nvSpPr>
-          <p:cNvPr id="18" name="Text 16"/>
+          <p:cNvPr id="19" name="Text 16"/>
           <p:cNvSpPr/>
           <p:nvPr/>
         </p:nvSpPr>
@@ -1529,7 +1553,7 @@
       </p:sp>
       <p:sp>
         <p:nvSpPr>
-          <p:cNvPr id="19" name="Shape 17"/>
+          <p:cNvPr id="20" name="Shape 17"/>
           <p:cNvSpPr/>
           <p:nvPr/>
         </p:nvSpPr>
@@ -1563,7 +1587,7 @@
       </p:sp>
       <p:sp>
         <p:nvSpPr>
-          <p:cNvPr id="20" name="Text 18"/>
+          <p:cNvPr id="21" name="Text 18"/>
           <p:cNvSpPr/>
           <p:nvPr/>
         </p:nvSpPr>
@@ -1602,7 +1626,7 @@
       </p:sp>
       <p:sp>
         <p:nvSpPr>
-          <p:cNvPr id="21" name="Text 19"/>
+          <p:cNvPr id="22" name="Text 19"/>
           <p:cNvSpPr/>
           <p:nvPr/>
         </p:nvSpPr>
@@ -1641,7 +1665,7 @@
       </p:sp>
       <p:sp>
         <p:nvSpPr>
-          <p:cNvPr id="22" name="Shape 20"/>
+          <p:cNvPr id="23" name="Shape 20"/>
           <p:cNvSpPr/>
           <p:nvPr/>
         </p:nvSpPr>
@@ -1675,7 +1699,7 @@
       </p:sp>
       <p:sp>
         <p:nvSpPr>
-          <p:cNvPr id="23" name="Text 21"/>
+          <p:cNvPr id="24" name="Text 21"/>
           <p:cNvSpPr/>
           <p:nvPr/>
         </p:nvSpPr>
@@ -1714,7 +1738,7 @@
       </p:sp>
       <p:sp>
         <p:nvSpPr>
-          <p:cNvPr id="24" name="Text 22"/>
+          <p:cNvPr id="25" name="Text 22"/>
           <p:cNvSpPr/>
           <p:nvPr/>
         </p:nvSpPr>
@@ -1753,7 +1777,7 @@
       </p:sp>
       <p:sp>
         <p:nvSpPr>
-          <p:cNvPr id="25" name="Shape 23"/>
+          <p:cNvPr id="26" name="Shape 23"/>
           <p:cNvSpPr/>
           <p:nvPr/>
         </p:nvSpPr>
@@ -1780,7 +1804,7 @@
       </p:sp>
       <p:sp>
         <p:nvSpPr>
-          <p:cNvPr id="26" name="Text 24"/>
+          <p:cNvPr id="27" name="Text 24"/>
           <p:cNvSpPr/>
           <p:nvPr/>
         </p:nvSpPr>
@@ -1833,7 +1857,7 @@
       </p:sp>
       <p:sp>
         <p:nvSpPr>
-          <p:cNvPr id="27" name="Shape 25"/>
+          <p:cNvPr id="28" name="Shape 25"/>
           <p:cNvSpPr/>
           <p:nvPr/>
         </p:nvSpPr>
@@ -1853,7 +1877,7 @@
       </p:sp>
       <p:sp>
         <p:nvSpPr>
-          <p:cNvPr id="28" name="Text 26"/>
+          <p:cNvPr id="29" name="Text 26"/>
           <p:cNvSpPr/>
           <p:nvPr/>
         </p:nvSpPr>
@@ -1912,7 +1936,7 @@
       </p:sp>
       <p:sp>
         <p:nvSpPr>
-          <p:cNvPr id="29" name="Shape 27"/>
+          <p:cNvPr id="30" name="Shape 27"/>
           <p:cNvSpPr/>
           <p:nvPr/>
         </p:nvSpPr>
@@ -1932,7 +1956,7 @@
       </p:sp>
       <p:sp>
         <p:nvSpPr>
-          <p:cNvPr id="30" name="Text 28"/>
+          <p:cNvPr id="31" name="Text 28"/>
           <p:cNvSpPr/>
           <p:nvPr/>
         </p:nvSpPr>
@@ -1991,7 +2015,7 @@
       </p:sp>
       <p:sp>
         <p:nvSpPr>
-          <p:cNvPr id="31" name="Shape 29"/>
+          <p:cNvPr id="32" name="Shape 29"/>
           <p:cNvSpPr/>
           <p:nvPr/>
         </p:nvSpPr>
@@ -2011,7 +2035,7 @@
       </p:sp>
       <p:sp>
         <p:nvSpPr>
-          <p:cNvPr id="32" name="Text 30"/>
+          <p:cNvPr id="33" name="Text 30"/>
           <p:cNvSpPr/>
           <p:nvPr/>
         </p:nvSpPr>
@@ -2070,7 +2094,7 @@
       </p:sp>
       <p:sp>
         <p:nvSpPr>
-          <p:cNvPr id="33" name="Shape 31"/>
+          <p:cNvPr id="34" name="Shape 31"/>
           <p:cNvSpPr/>
           <p:nvPr/>
         </p:nvSpPr>
@@ -2092,7 +2116,7 @@
       </p:sp>
       <p:sp>
         <p:nvSpPr>
-          <p:cNvPr id="34" name="Text 32"/>
+          <p:cNvPr id="35" name="Text 32"/>
           <p:cNvSpPr/>
           <p:nvPr/>
         </p:nvSpPr>
@@ -2177,7 +2201,7 @@
       </p:sp>
       <p:sp>
         <p:nvSpPr>
-          <p:cNvPr id="35" name="Shape 33"/>
+          <p:cNvPr id="36" name="Shape 33"/>
           <p:cNvSpPr/>
           <p:nvPr/>
         </p:nvSpPr>
@@ -2204,7 +2228,7 @@
       </p:sp>
       <p:sp>
         <p:nvSpPr>
-          <p:cNvPr id="36" name="Text 34"/>
+          <p:cNvPr id="37" name="Text 34"/>
           <p:cNvSpPr/>
           <p:nvPr/>
         </p:nvSpPr>
@@ -2257,7 +2281,7 @@
       </p:sp>
       <p:sp>
         <p:nvSpPr>
-          <p:cNvPr id="37" name="Shape 35"/>
+          <p:cNvPr id="38" name="Shape 35"/>
           <p:cNvSpPr/>
           <p:nvPr/>
         </p:nvSpPr>
@@ -2280,7 +2304,7 @@
       </p:sp>
       <p:sp>
         <p:nvSpPr>
-          <p:cNvPr id="38" name="Shape 36"/>
+          <p:cNvPr id="39" name="Shape 36"/>
           <p:cNvSpPr/>
           <p:nvPr/>
         </p:nvSpPr>
@@ -2302,7 +2326,7 @@
       </p:sp>
       <p:sp>
         <p:nvSpPr>
-          <p:cNvPr id="39" name="Text 37"/>
+          <p:cNvPr id="40" name="Text 37"/>
           <p:cNvSpPr/>
           <p:nvPr/>
         </p:nvSpPr>
@@ -2341,7 +2365,7 @@
       </p:sp>
       <p:sp>
         <p:nvSpPr>
-          <p:cNvPr id="40" name="Text 38"/>
+          <p:cNvPr id="41" name="Text 38"/>
           <p:cNvSpPr/>
           <p:nvPr/>
         </p:nvSpPr>
@@ -2380,7 +2404,7 @@
       </p:sp>
       <p:sp>
         <p:nvSpPr>
-          <p:cNvPr id="41" name="Shape 39"/>
+          <p:cNvPr id="42" name="Shape 39"/>
           <p:cNvSpPr/>
           <p:nvPr/>
         </p:nvSpPr>
@@ -2402,7 +2426,7 @@
       </p:sp>
       <p:sp>
         <p:nvSpPr>
-          <p:cNvPr id="42" name="Text 40"/>
+          <p:cNvPr id="43" name="Text 40"/>
           <p:cNvSpPr/>
           <p:nvPr/>
         </p:nvSpPr>
@@ -2441,7 +2465,7 @@
       </p:sp>
       <p:sp>
         <p:nvSpPr>
-          <p:cNvPr id="43" name="Text 41"/>
+          <p:cNvPr id="44" name="Text 41"/>
           <p:cNvSpPr/>
           <p:nvPr/>
         </p:nvSpPr>
@@ -2480,7 +2504,7 @@
       </p:sp>
       <p:sp>
         <p:nvSpPr>
-          <p:cNvPr id="44" name="Shape 42"/>
+          <p:cNvPr id="45" name="Shape 42"/>
           <p:cNvSpPr/>
           <p:nvPr/>
         </p:nvSpPr>
@@ -2502,7 +2526,7 @@
       </p:sp>
       <p:sp>
         <p:nvSpPr>
-          <p:cNvPr id="45" name="Text 43"/>
+          <p:cNvPr id="46" name="Text 43"/>
           <p:cNvSpPr/>
           <p:nvPr/>
         </p:nvSpPr>
@@ -2541,7 +2565,7 @@
       </p:sp>
       <p:sp>
         <p:nvSpPr>
-          <p:cNvPr id="46" name="Text 44"/>
+          <p:cNvPr id="47" name="Text 44"/>
           <p:cNvSpPr/>
           <p:nvPr/>
         </p:nvSpPr>
@@ -2580,7 +2604,7 @@
       </p:sp>
       <p:sp>
         <p:nvSpPr>
-          <p:cNvPr id="47" name="Shape 45"/>
+          <p:cNvPr id="48" name="Shape 45"/>
           <p:cNvSpPr/>
           <p:nvPr/>
         </p:nvSpPr>
@@ -2602,7 +2626,7 @@
       </p:sp>
       <p:sp>
         <p:nvSpPr>
-          <p:cNvPr id="48" name="Text 46"/>
+          <p:cNvPr id="49" name="Text 46"/>
           <p:cNvSpPr/>
           <p:nvPr/>
         </p:nvSpPr>
@@ -2678,7 +2702,7 @@
       </p:sp>
       <p:sp>
         <p:nvSpPr>
-          <p:cNvPr id="49" name="Shape 47"/>
+          <p:cNvPr id="50" name="Shape 47"/>
           <p:cNvSpPr/>
           <p:nvPr/>
         </p:nvSpPr>
@@ -2705,7 +2729,7 @@
       </p:sp>
       <p:sp>
         <p:nvSpPr>
-          <p:cNvPr id="50" name="Text 48"/>
+          <p:cNvPr id="51" name="Text 48"/>
           <p:cNvSpPr/>
           <p:nvPr/>
         </p:nvSpPr>
@@ -2758,7 +2782,7 @@
       </p:sp>
       <p:sp>
         <p:nvSpPr>
-          <p:cNvPr id="51" name="Text 49"/>
+          <p:cNvPr id="52" name="Text 49"/>
           <p:cNvSpPr/>
           <p:nvPr/>
         </p:nvSpPr>
@@ -2797,7 +2821,7 @@
       </p:sp>
       <p:sp>
         <p:nvSpPr>
-          <p:cNvPr id="52" name="Text 50"/>
+          <p:cNvPr id="53" name="Text 50"/>
           <p:cNvSpPr/>
           <p:nvPr/>
         </p:nvSpPr>
@@ -2856,7 +2880,7 @@
       </p:sp>
       <p:sp>
         <p:nvSpPr>
-          <p:cNvPr id="53" name="Text 51"/>
+          <p:cNvPr id="54" name="Text 51"/>
           <p:cNvSpPr/>
           <p:nvPr/>
         </p:nvSpPr>
@@ -2895,7 +2919,7 @@
       </p:sp>
       <p:sp>
         <p:nvSpPr>
-          <p:cNvPr id="54" name="Text 52"/>
+          <p:cNvPr id="55" name="Text 52"/>
           <p:cNvSpPr/>
           <p:nvPr/>
         </p:nvSpPr>
@@ -2954,7 +2978,7 @@
       </p:sp>
       <p:sp>
         <p:nvSpPr>
-          <p:cNvPr id="55" name="Text 53"/>
+          <p:cNvPr id="56" name="Text 53"/>
           <p:cNvSpPr/>
           <p:nvPr/>
         </p:nvSpPr>
@@ -2993,7 +3017,7 @@
       </p:sp>
       <p:sp>
         <p:nvSpPr>
-          <p:cNvPr id="56" name="Text 54"/>
+          <p:cNvPr id="57" name="Text 54"/>
           <p:cNvSpPr/>
           <p:nvPr/>
         </p:nvSpPr>
@@ -3052,7 +3076,7 @@
       </p:sp>
       <p:sp>
         <p:nvSpPr>
-          <p:cNvPr id="57" name="Text 55"/>
+          <p:cNvPr id="58" name="Text 55"/>
           <p:cNvSpPr/>
           <p:nvPr/>
         </p:nvSpPr>
@@ -3091,7 +3115,7 @@
       </p:sp>
       <p:sp>
         <p:nvSpPr>
-          <p:cNvPr id="58" name="Text 56"/>
+          <p:cNvPr id="59" name="Text 56"/>
           <p:cNvSpPr/>
           <p:nvPr/>
         </p:nvSpPr>
@@ -3130,7 +3154,7 @@
       </p:sp>
       <p:sp>
         <p:nvSpPr>
-          <p:cNvPr id="59" name="Shape 57"/>
+          <p:cNvPr id="60" name="Shape 57"/>
           <p:cNvSpPr/>
           <p:nvPr/>
         </p:nvSpPr>
@@ -3152,7 +3176,7 @@
       </p:sp>
       <p:sp>
         <p:nvSpPr>
-          <p:cNvPr id="60" name="Text 58"/>
+          <p:cNvPr id="61" name="Text 58"/>
           <p:cNvSpPr/>
           <p:nvPr/>
         </p:nvSpPr>
@@ -3191,7 +3215,7 @@
       </p:sp>
       <p:sp>
         <p:nvSpPr>
-          <p:cNvPr id="61" name="Text 59"/>
+          <p:cNvPr id="62" name="Text 59"/>
           <p:cNvSpPr/>
           <p:nvPr/>
         </p:nvSpPr>
@@ -3230,7 +3254,7 @@
       </p:sp>
       <p:sp>
         <p:nvSpPr>
-          <p:cNvPr id="62" name="Shape 60"/>
+          <p:cNvPr id="63" name="Shape 60"/>
           <p:cNvSpPr/>
           <p:nvPr/>
         </p:nvSpPr>
@@ -3252,7 +3276,7 @@
       </p:sp>
       <p:sp>
         <p:nvSpPr>
-          <p:cNvPr id="63" name="Text 61"/>
+          <p:cNvPr id="64" name="Text 61"/>
           <p:cNvSpPr/>
           <p:nvPr/>
         </p:nvSpPr>
@@ -3291,7 +3315,7 @@
       </p:sp>
       <p:sp>
         <p:nvSpPr>
-          <p:cNvPr id="64" name="Text 62"/>
+          <p:cNvPr id="65" name="Text 62"/>
           <p:cNvSpPr/>
           <p:nvPr/>
         </p:nvSpPr>
@@ -3330,7 +3354,7 @@
       </p:sp>
       <p:sp>
         <p:nvSpPr>
-          <p:cNvPr id="65" name="Shape 63"/>
+          <p:cNvPr id="66" name="Shape 63"/>
           <p:cNvSpPr/>
           <p:nvPr/>
         </p:nvSpPr>
@@ -3352,7 +3376,7 @@
       </p:sp>
       <p:sp>
         <p:nvSpPr>
-          <p:cNvPr id="66" name="Text 64"/>
+          <p:cNvPr id="67" name="Text 64"/>
           <p:cNvSpPr/>
           <p:nvPr/>
         </p:nvSpPr>
@@ -3391,7 +3415,7 @@
       </p:sp>
       <p:sp>
         <p:nvSpPr>
-          <p:cNvPr id="67" name="Shape 65"/>
+          <p:cNvPr id="68" name="Shape 65"/>
           <p:cNvSpPr/>
           <p:nvPr/>
         </p:nvSpPr>
@@ -3413,7 +3437,7 @@
       </p:sp>
       <p:sp>
         <p:nvSpPr>
-          <p:cNvPr id="68" name="Text 66"/>
+          <p:cNvPr id="69" name="Text 66"/>
           <p:cNvSpPr/>
           <p:nvPr/>
         </p:nvSpPr>
@@ -3473,7 +3497,7 @@
       </p:sp>
       <p:sp>
         <p:nvSpPr>
-          <p:cNvPr id="69" name="Shape 67"/>
+          <p:cNvPr id="70" name="Shape 67"/>
           <p:cNvSpPr/>
           <p:nvPr/>
         </p:nvSpPr>
@@ -3495,7 +3519,7 @@
       </p:sp>
       <p:sp>
         <p:nvSpPr>
-          <p:cNvPr id="70" name="Text 68"/>
+          <p:cNvPr id="71" name="Text 68"/>
           <p:cNvSpPr/>
           <p:nvPr/>
         </p:nvSpPr>
@@ -3573,7 +3597,7 @@
       </p:sp>
       <p:sp>
         <p:nvSpPr>
-          <p:cNvPr id="71" name="Shape 69"/>
+          <p:cNvPr id="72" name="Shape 69"/>
           <p:cNvSpPr/>
           <p:nvPr/>
         </p:nvSpPr>
@@ -3595,7 +3619,7 @@
       </p:sp>
       <p:sp>
         <p:nvSpPr>
-          <p:cNvPr id="72" name="Text 70"/>
+          <p:cNvPr id="73" name="Text 70"/>
           <p:cNvSpPr/>
           <p:nvPr/>
         </p:nvSpPr>
@@ -3673,7 +3697,7 @@
       </p:sp>
       <p:sp>
         <p:nvSpPr>
-          <p:cNvPr id="73" name="Shape 71"/>
+          <p:cNvPr id="74" name="Shape 71"/>
           <p:cNvSpPr/>
           <p:nvPr/>
         </p:nvSpPr>
@@ -3695,7 +3719,7 @@
       </p:sp>
       <p:sp>
         <p:nvSpPr>
-          <p:cNvPr id="74" name="Text 72"/>
+          <p:cNvPr id="75" name="Text 72"/>
           <p:cNvSpPr/>
           <p:nvPr/>
         </p:nvSpPr>
@@ -3773,7 +3797,7 @@
       </p:sp>
       <p:sp>
         <p:nvSpPr>
-          <p:cNvPr id="75" name="Text 73"/>
+          <p:cNvPr id="76" name="Text 73"/>
           <p:cNvSpPr/>
           <p:nvPr/>
         </p:nvSpPr>
@@ -3812,7 +3836,7 @@
       </p:sp>
       <p:sp>
         <p:nvSpPr>
-          <p:cNvPr id="76" name="Text 74"/>
+          <p:cNvPr id="77" name="Text 74"/>
           <p:cNvSpPr/>
           <p:nvPr/>
         </p:nvSpPr>
@@ -3851,7 +3875,7 @@
       </p:sp>
       <p:sp>
         <p:nvSpPr>
-          <p:cNvPr id="77" name="Text 75"/>
+          <p:cNvPr id="78" name="Text 75"/>
           <p:cNvSpPr/>
           <p:nvPr/>
         </p:nvSpPr>
@@ -3893,7 +3917,7 @@
       </p:sp>
       <p:sp>
         <p:nvSpPr>
-          <p:cNvPr id="78" name="Text 76"/>
+          <p:cNvPr id="79" name="Text 76"/>
           <p:cNvSpPr/>
           <p:nvPr/>
         </p:nvSpPr>
@@ -3932,7 +3956,7 @@
       </p:sp>
       <p:sp>
         <p:nvSpPr>
-          <p:cNvPr id="79" name="Text 77"/>
+          <p:cNvPr id="80" name="Text 77"/>
           <p:cNvSpPr/>
           <p:nvPr/>
         </p:nvSpPr>
